--- a/deck/Pawtient_AI_和泰加速器提案.pptx
+++ b/deck/Pawtient_AI_和泰加速器提案.pptx
@@ -4359,7 +4359,7 @@
                 <a:latin typeface="PingFang TC"/>
                 <a:ea typeface="PingFang TC"/>
               </a:rPr>
-              <a:t>不涉系統整合、不簽長約、資料不落地、不作核保依據——完全可逆。效益為待和泰用實際數據共同驗證的假設。</a:t>
+              <a:t>成功定義：關鍵指標出現雙方認可的可衡量改善 → 一起談擴大；否則試點乾淨結束、毫無綁定。不涉系統整合、不簽長約、資料不落地、不作核保依據——完全可逆。</a:t>
             </a:r>
           </a:p>
         </p:txBody>
@@ -5167,7 +5167,99 @@
       </p:sp>
       <p:sp>
         <p:nvSpPr>
-          <p:cNvPr id="13" name="TextBox 12"/>
+          <p:cNvPr id="13" name="Rounded Rectangle 12"/>
+          <p:cNvSpPr/>
+          <p:nvPr/>
+        </p:nvSpPr>
+        <p:spPr>
+          <a:xfrm>
+            <a:off x="841248" y="5669280"/>
+            <a:ext cx="10506456" cy="566928"/>
+          </a:xfrm>
+          <a:prstGeom prst="roundRect">
+            <a:avLst>
+              <a:gd name="adj" fmla="val 6000"/>
+            </a:avLst>
+          </a:prstGeom>
+          <a:solidFill>
+            <a:srgbClr val="2A1622"/>
+          </a:solidFill>
+          <a:ln>
+            <a:noFill/>
+          </a:ln>
+          <a:effectLst/>
+        </p:spPr>
+        <p:style>
+          <a:lnRef idx="1">
+            <a:schemeClr val="accent1"/>
+          </a:lnRef>
+          <a:fillRef idx="3">
+            <a:schemeClr val="accent1"/>
+          </a:fillRef>
+          <a:effectRef idx="2">
+            <a:schemeClr val="accent1"/>
+          </a:effectRef>
+          <a:fontRef idx="minor">
+            <a:schemeClr val="lt1"/>
+          </a:fontRef>
+        </p:style>
+        <p:txBody>
+          <a:bodyPr rtlCol="0" anchor="ctr"/>
+          <a:lstStyle/>
+          <a:p>
+            <a:pPr algn="ctr"/>
+          </a:p>
+        </p:txBody>
+      </p:sp>
+      <p:sp>
+        <p:nvSpPr>
+          <p:cNvPr id="14" name="TextBox 13"/>
+          <p:cNvSpPr txBox="1"/>
+          <p:nvPr/>
+        </p:nvSpPr>
+        <p:spPr>
+          <a:xfrm>
+            <a:off x="1097280" y="5779008"/>
+            <a:ext cx="10058400" cy="365760"/>
+          </a:xfrm>
+          <a:prstGeom prst="rect">
+            <a:avLst/>
+          </a:prstGeom>
+          <a:noFill/>
+        </p:spPr>
+        <p:txBody>
+          <a:bodyPr wrap="square" anchor="ctr" lIns="0" rIns="0" tIns="0" bIns="0">
+            <a:spAutoFit/>
+          </a:bodyPr>
+          <a:lstStyle/>
+          <a:p>
+            <a:pPr algn="l"/>
+            <a:r>
+              <a:rPr sz="1250" b="1" i="0">
+                <a:solidFill>
+                  <a:srgbClr val="D47FA6"/>
+                </a:solidFill>
+                <a:latin typeface="PingFang TC"/>
+                <a:ea typeface="PingFang TC"/>
+              </a:rPr>
+              <a:t>投入不對稱　</a:t>
+            </a:r>
+            <a:r>
+              <a:rPr sz="1200" b="1" i="0">
+                <a:solidFill>
+                  <a:srgbClr val="FFFFFF"/>
+                </a:solidFill>
+                <a:latin typeface="PingFang TC"/>
+                <a:ea typeface="PingFang TC"/>
+              </a:rPr>
+              <a:t>和泰幾乎只用既有資源、近乎零額外投入；我們帶來已建好、可直接導入的產品——這正是低風險進場的底氣。</a:t>
+            </a:r>
+          </a:p>
+        </p:txBody>
+      </p:sp>
+      <p:sp>
+        <p:nvSpPr>
+          <p:cNvPr id="15" name="TextBox 14"/>
           <p:cNvSpPr txBox="1"/>
           <p:nvPr/>
         </p:nvSpPr>
@@ -5714,7 +5806,111 @@
       </p:sp>
       <p:sp>
         <p:nvSpPr>
-          <p:cNvPr id="12" name="Rounded Rectangle 11"/>
+          <p:cNvPr id="11" name="Rounded Rectangle 10"/>
+          <p:cNvSpPr/>
+          <p:nvPr/>
+        </p:nvSpPr>
+        <p:spPr>
+          <a:xfrm>
+            <a:off x="841248" y="5577840"/>
+            <a:ext cx="5486400" cy="868680"/>
+          </a:xfrm>
+          <a:prstGeom prst="roundRect">
+            <a:avLst>
+              <a:gd name="adj" fmla="val 6000"/>
+            </a:avLst>
+          </a:prstGeom>
+          <a:solidFill>
+            <a:srgbClr val="F6E9F0"/>
+          </a:solidFill>
+          <a:ln w="12700">
+            <a:solidFill>
+              <a:srgbClr val="EBD3DF"/>
+            </a:solidFill>
+          </a:ln>
+          <a:effectLst/>
+        </p:spPr>
+        <p:style>
+          <a:lnRef idx="1">
+            <a:schemeClr val="accent1"/>
+          </a:lnRef>
+          <a:fillRef idx="3">
+            <a:schemeClr val="accent1"/>
+          </a:fillRef>
+          <a:effectRef idx="2">
+            <a:schemeClr val="accent1"/>
+          </a:effectRef>
+          <a:fontRef idx="minor">
+            <a:schemeClr val="lt1"/>
+          </a:fontRef>
+        </p:style>
+        <p:txBody>
+          <a:bodyPr rtlCol="0" anchor="ctr"/>
+          <a:lstStyle/>
+          <a:p>
+            <a:pPr algn="ctr"/>
+          </a:p>
+        </p:txBody>
+      </p:sp>
+      <p:sp>
+        <p:nvSpPr>
+          <p:cNvPr id="12" name="TextBox 11"/>
+          <p:cNvSpPr txBox="1"/>
+          <p:nvPr/>
+        </p:nvSpPr>
+        <p:spPr>
+          <a:xfrm>
+            <a:off x="1078992" y="5687568"/>
+            <a:ext cx="5029200" cy="640080"/>
+          </a:xfrm>
+          <a:prstGeom prst="rect">
+            <a:avLst/>
+          </a:prstGeom>
+          <a:noFill/>
+        </p:spPr>
+        <p:txBody>
+          <a:bodyPr wrap="square" anchor="t" lIns="0" rIns="0" tIns="0" bIns="0">
+            <a:spAutoFit/>
+          </a:bodyPr>
+          <a:lstStyle/>
+          <a:p>
+            <a:pPr algn="l"/>
+            <a:r>
+              <a:rPr sz="1150" b="1" i="0">
+                <a:solidFill>
+                  <a:srgbClr val="8C3E66"/>
+                </a:solidFill>
+                <a:latin typeface="PingFang TC"/>
+                <a:ea typeface="PingFang TC"/>
+              </a:rPr>
+              <a:t>已具備（非構想）　</a:t>
+            </a:r>
+          </a:p>
+          <a:p>
+            <a:pPr algn="l">
+              <a:lnSpc>
+                <a:spcPct val="130000"/>
+              </a:lnSpc>
+              <a:spcBef>
+                <a:spcPts val="300"/>
+              </a:spcBef>
+            </a:pPr>
+            <a:r>
+              <a:rPr sz="1100" b="1" i="0">
+                <a:solidFill>
+                  <a:srgbClr val="2B2126"/>
+                </a:solidFill>
+                <a:latin typeface="PingFang TC"/>
+                <a:ea typeface="PingFang TC"/>
+              </a:rPr>
+              <a:t>✓ 雙平台上架　✓ 保戶端理賠流程　✓ 理賠審核台　✓ Pawtient Watch　✓ Claude／ChatGPT 連接器</a:t>
+            </a:r>
+          </a:p>
+        </p:txBody>
+      </p:sp>
+      <p:sp>
+        <p:nvSpPr>
+          <p:cNvPr id="14" name="Rounded Rectangle 13"/>
           <p:cNvSpPr/>
           <p:nvPr/>
         </p:nvSpPr>
@@ -5760,7 +5956,7 @@
       </p:sp>
       <p:pic>
         <p:nvPicPr>
-          <p:cNvPr id="11" name="Picture 10" descr="demo_owner_claim.png"/>
+          <p:cNvPr id="13" name="Picture 12" descr="demo_owner_claim.png"/>
           <p:cNvPicPr>
             <a:picLocks noChangeAspect="1"/>
           </p:cNvPicPr>
@@ -5784,7 +5980,7 @@
       </p:pic>
       <p:sp>
         <p:nvSpPr>
-          <p:cNvPr id="14" name="Rounded Rectangle 13"/>
+          <p:cNvPr id="16" name="Rounded Rectangle 15"/>
           <p:cNvSpPr/>
           <p:nvPr/>
         </p:nvSpPr>
@@ -5830,7 +6026,7 @@
       </p:sp>
       <p:pic>
         <p:nvPicPr>
-          <p:cNvPr id="13" name="Picture 12" descr="demo_watch_events.png"/>
+          <p:cNvPr id="15" name="Picture 14" descr="demo_watch_events.png"/>
           <p:cNvPicPr>
             <a:picLocks noChangeAspect="1"/>
           </p:cNvPicPr>
@@ -5854,7 +6050,7 @@
       </p:pic>
       <p:sp>
         <p:nvSpPr>
-          <p:cNvPr id="15" name="TextBox 14"/>
+          <p:cNvPr id="17" name="TextBox 16"/>
           <p:cNvSpPr txBox="1"/>
           <p:nvPr/>
         </p:nvSpPr>
@@ -6564,47 +6760,128 @@
       </p:sp>
       <p:sp>
         <p:nvSpPr>
-          <p:cNvPr id="18" name="TextBox 17"/>
-          <p:cNvSpPr txBox="1"/>
-          <p:nvPr/>
-        </p:nvSpPr>
-        <p:spPr>
-          <a:xfrm>
-            <a:off x="841248" y="5349240"/>
-            <a:ext cx="10515600" cy="548640"/>
-          </a:xfrm>
-          <a:prstGeom prst="rect">
-            <a:avLst/>
-          </a:prstGeom>
-          <a:noFill/>
-        </p:spPr>
-        <p:txBody>
-          <a:bodyPr wrap="square" anchor="t" lIns="0" rIns="0" tIns="0" bIns="0">
-            <a:spAutoFit/>
-          </a:bodyPr>
-          <a:lstStyle/>
+          <p:cNvPr id="18" name="Rounded Rectangle 17"/>
+          <p:cNvSpPr/>
+          <p:nvPr/>
+        </p:nvSpPr>
+        <p:spPr>
+          <a:xfrm>
+            <a:off x="841248" y="5193792"/>
+            <a:ext cx="10506456" cy="950976"/>
+          </a:xfrm>
+          <a:prstGeom prst="roundRect">
+            <a:avLst>
+              <a:gd name="adj" fmla="val 6000"/>
+            </a:avLst>
+          </a:prstGeom>
+          <a:solidFill>
+            <a:srgbClr val="3A2230"/>
+          </a:solidFill>
+          <a:ln w="12700">
+            <a:solidFill>
+              <a:srgbClr val="523344"/>
+            </a:solidFill>
+          </a:ln>
+          <a:effectLst/>
+        </p:spPr>
+        <p:style>
+          <a:lnRef idx="1">
+            <a:schemeClr val="accent1"/>
+          </a:lnRef>
+          <a:fillRef idx="3">
+            <a:schemeClr val="accent1"/>
+          </a:fillRef>
+          <a:effectRef idx="2">
+            <a:schemeClr val="accent1"/>
+          </a:effectRef>
+          <a:fontRef idx="minor">
+            <a:schemeClr val="lt1"/>
+          </a:fontRef>
+        </p:style>
+        <p:txBody>
+          <a:bodyPr rtlCol="0" anchor="ctr"/>
+          <a:lstStyle/>
+          <a:p>
+            <a:pPr algn="ctr"/>
+          </a:p>
+        </p:txBody>
+      </p:sp>
+      <p:sp>
+        <p:nvSpPr>
+          <p:cNvPr id="19" name="TextBox 18"/>
+          <p:cNvSpPr txBox="1"/>
+          <p:nvPr/>
+        </p:nvSpPr>
+        <p:spPr>
+          <a:xfrm>
+            <a:off x="1097280" y="5303520"/>
+            <a:ext cx="10058400" cy="777240"/>
+          </a:xfrm>
+          <a:prstGeom prst="rect">
+            <a:avLst/>
+          </a:prstGeom>
+          <a:noFill/>
+        </p:spPr>
+        <p:txBody>
+          <a:bodyPr wrap="square" anchor="t" lIns="0" rIns="0" tIns="0" bIns="0">
+            <a:spAutoFit/>
+          </a:bodyPr>
+          <a:lstStyle/>
+          <a:p>
+            <a:pPr algn="l"/>
+            <a:r>
+              <a:rPr sz="1200" b="1" i="0">
+                <a:solidFill>
+                  <a:srgbClr val="D47FA6"/>
+                </a:solidFill>
+                <a:latin typeface="PingFang TC"/>
+                <a:ea typeface="PingFang TC"/>
+              </a:rPr>
+              <a:t>市場錨點　</a:t>
+            </a:r>
+            <a:r>
+              <a:rPr sz="1150" b="0" i="0">
+                <a:solidFill>
+                  <a:srgbClr val="D8BECB"/>
+                </a:solidFill>
+                <a:latin typeface="PingFang TC"/>
+                <a:ea typeface="PingFang TC"/>
+              </a:rPr>
+              <a:t>台灣寵物市場約 631 億元；10 歲以上貓 40%、15 歲以上 80% 受慢性腎臟病影響——慢性病正是理賠最痛、最需要事前資料的地方。</a:t>
+            </a:r>
+          </a:p>
           <a:p>
             <a:pPr algn="l">
-              <a:lnSpc>
-                <a:spcPct val="140000"/>
-              </a:lnSpc>
+              <a:spcBef>
+                <a:spcPts val="400"/>
+              </a:spcBef>
             </a:pPr>
             <a:r>
-              <a:rPr sz="1300" b="0" i="0">
+              <a:rPr sz="1200" b="1" i="0">
+                <a:solidFill>
+                  <a:srgbClr val="D47FA6"/>
+                </a:solidFill>
+                <a:latin typeface="PingFang TC"/>
+                <a:ea typeface="PingFang TC"/>
+              </a:rPr>
+              <a:t>為什麼是現在　</a:t>
+            </a:r>
+            <a:r>
+              <a:rPr sz="1150" b="0" i="0">
                 <a:solidFill>
                   <a:srgbClr val="D8BECB"/>
                 </a:solidFill>
                 <a:latin typeface="PingFang TC"/>
                 <a:ea typeface="PingFang TC"/>
               </a:rPr>
-              <a:t>我們和和泰先在寵物險把「事前資料 → 銷售與審核」這條路走通，方法論本身就是可複用的資產。</a:t>
-            </a:r>
-          </a:p>
-        </p:txBody>
-      </p:sp>
-      <p:sp>
-        <p:nvSpPr>
-          <p:cNvPr id="19" name="TextBox 18"/>
+              <a:t>AI 成熟 × 寵物醫療數位化 × 我們已經上線——時間窗口正開。</a:t>
+            </a:r>
+          </a:p>
+        </p:txBody>
+      </p:sp>
+      <p:sp>
+        <p:nvSpPr>
+          <p:cNvPr id="20" name="TextBox 19"/>
           <p:cNvSpPr txBox="1"/>
           <p:nvPr/>
         </p:nvSpPr>
@@ -14448,7 +14725,7 @@
         </p:nvSpPr>
         <p:spPr>
           <a:xfrm>
-            <a:off x="1892808" y="2971800"/>
+            <a:off x="1892808" y="2962656"/>
             <a:ext cx="3794760" cy="365760"/>
           </a:xfrm>
           <a:prstGeom prst="rect">
@@ -14464,7 +14741,7 @@
           <a:p>
             <a:pPr algn="l"/>
             <a:r>
-              <a:rPr sz="1550" b="1" i="0">
+              <a:rPr sz="1500" b="1" i="0">
                 <a:solidFill>
                   <a:srgbClr val="2B2126"/>
                 </a:solidFill>
@@ -14474,14 +14751,14 @@
               <a:t>平均審核工時</a:t>
             </a:r>
             <a:r>
-              <a:rPr sz="1050" b="1" i="0">
+              <a:rPr sz="1000" b="0" i="1">
                 <a:solidFill>
                   <a:srgbClr val="9C8B95"/>
                 </a:solidFill>
                 <a:latin typeface="PingFang TC"/>
                 <a:ea typeface="PingFang TC"/>
               </a:rPr>
-              <a:t>　待試點驗證</a:t>
+              <a:t>   Claim processing time</a:t>
             </a:r>
           </a:p>
         </p:txBody>
@@ -14618,7 +14895,7 @@
         </p:nvSpPr>
         <p:spPr>
           <a:xfrm>
-            <a:off x="7324344" y="2971800"/>
+            <a:off x="7324344" y="2962656"/>
             <a:ext cx="3794760" cy="365760"/>
           </a:xfrm>
           <a:prstGeom prst="rect">
@@ -14634,7 +14911,7 @@
           <a:p>
             <a:pPr algn="l"/>
             <a:r>
-              <a:rPr sz="1550" b="1" i="0">
+              <a:rPr sz="1500" b="1" i="0">
                 <a:solidFill>
                   <a:srgbClr val="2B2126"/>
                 </a:solidFill>
@@ -14644,14 +14921,14 @@
               <a:t>補件往返次數</a:t>
             </a:r>
             <a:r>
-              <a:rPr sz="1050" b="1" i="0">
+              <a:rPr sz="1000" b="0" i="1">
                 <a:solidFill>
                   <a:srgbClr val="9C8B95"/>
                 </a:solidFill>
                 <a:latin typeface="PingFang TC"/>
                 <a:ea typeface="PingFang TC"/>
               </a:rPr>
-              <a:t>　待試點驗證</a:t>
+              <a:t>   Document back-and-forth</a:t>
             </a:r>
           </a:p>
         </p:txBody>
@@ -14788,7 +15065,7 @@
         </p:nvSpPr>
         <p:spPr>
           <a:xfrm>
-            <a:off x="1892808" y="4160519"/>
+            <a:off x="1892808" y="4151375"/>
             <a:ext cx="3794760" cy="365760"/>
           </a:xfrm>
           <a:prstGeom prst="rect">
@@ -14804,7 +15081,7 @@
           <a:p>
             <a:pPr algn="l"/>
             <a:r>
-              <a:rPr sz="1550" b="1" i="0">
+              <a:rPr sz="1500" b="1" i="0">
                 <a:solidFill>
                   <a:srgbClr val="2B2126"/>
                 </a:solidFill>
@@ -14814,14 +15091,14 @@
               <a:t>人工判讀時間</a:t>
             </a:r>
             <a:r>
-              <a:rPr sz="1050" b="1" i="0">
+              <a:rPr sz="1000" b="0" i="1">
                 <a:solidFill>
                   <a:srgbClr val="9C8B95"/>
                 </a:solidFill>
                 <a:latin typeface="PingFang TC"/>
                 <a:ea typeface="PingFang TC"/>
               </a:rPr>
-              <a:t>　待試點驗證</a:t>
+              <a:t>   Manual review effort</a:t>
             </a:r>
           </a:p>
         </p:txBody>
@@ -14958,7 +15235,7 @@
         </p:nvSpPr>
         <p:spPr>
           <a:xfrm>
-            <a:off x="7324344" y="4160519"/>
+            <a:off x="7324344" y="4151375"/>
             <a:ext cx="3794760" cy="365760"/>
           </a:xfrm>
           <a:prstGeom prst="rect">
@@ -14974,7 +15251,7 @@
           <a:p>
             <a:pPr algn="l"/>
             <a:r>
-              <a:rPr sz="1550" b="1" i="0">
+              <a:rPr sz="1500" b="1" i="0">
                 <a:solidFill>
                   <a:srgbClr val="2B2126"/>
                 </a:solidFill>
@@ -14984,14 +15261,14 @@
               <a:t>爭議案件比例</a:t>
             </a:r>
             <a:r>
-              <a:rPr sz="1050" b="1" i="0">
+              <a:rPr sz="1000" b="0" i="1">
                 <a:solidFill>
                   <a:srgbClr val="9C8B95"/>
                 </a:solidFill>
                 <a:latin typeface="PingFang TC"/>
                 <a:ea typeface="PingFang TC"/>
               </a:rPr>
-              <a:t>　待試點驗證</a:t>
+              <a:t>   Dispute rate</a:t>
             </a:r>
           </a:p>
         </p:txBody>
@@ -15343,8 +15620,8 @@
         </p:nvSpPr>
         <p:spPr>
           <a:xfrm>
-            <a:off x="841248" y="2423160"/>
-            <a:ext cx="3346704" cy="2377440"/>
+            <a:off x="841248" y="2286000"/>
+            <a:ext cx="3346704" cy="2148840"/>
           </a:xfrm>
           <a:prstGeom prst="roundRect">
             <a:avLst>
@@ -15391,7 +15668,7 @@
         </p:nvSpPr>
         <p:spPr>
           <a:xfrm>
-            <a:off x="1133856" y="2697480"/>
+            <a:off x="1133856" y="2542032"/>
             <a:ext cx="2798064" cy="274320"/>
           </a:xfrm>
           <a:prstGeom prst="rect">
@@ -15427,7 +15704,7 @@
         </p:nvSpPr>
         <p:spPr>
           <a:xfrm>
-            <a:off x="1133856" y="3026664"/>
+            <a:off x="1133856" y="2852928"/>
             <a:ext cx="2798064" cy="457200"/>
           </a:xfrm>
           <a:prstGeom prst="rect">
@@ -15463,8 +15740,8 @@
         </p:nvSpPr>
         <p:spPr>
           <a:xfrm>
-            <a:off x="1133856" y="3657600"/>
-            <a:ext cx="2798064" cy="1005840"/>
+            <a:off x="1133856" y="3456432"/>
+            <a:ext cx="2798064" cy="914400"/>
           </a:xfrm>
           <a:prstGeom prst="rect">
             <a:avLst/>
@@ -15479,11 +15756,11 @@
           <a:p>
             <a:pPr algn="l">
               <a:lnSpc>
-                <a:spcPct val="140000"/>
+                <a:spcPct val="136000"/>
               </a:lnSpc>
             </a:pPr>
             <a:r>
-              <a:rPr sz="1250" b="0" i="0">
+              <a:rPr sz="1200" b="0" i="0">
                 <a:solidFill>
                   <a:srgbClr val="6E5C66"/>
                 </a:solidFill>
@@ -15503,8 +15780,8 @@
         </p:nvSpPr>
         <p:spPr>
           <a:xfrm>
-            <a:off x="4425696" y="2423160"/>
-            <a:ext cx="3346704" cy="2377440"/>
+            <a:off x="4425696" y="2286000"/>
+            <a:ext cx="3346704" cy="2148840"/>
           </a:xfrm>
           <a:prstGeom prst="roundRect">
             <a:avLst>
@@ -15551,7 +15828,7 @@
         </p:nvSpPr>
         <p:spPr>
           <a:xfrm>
-            <a:off x="4718304" y="2697480"/>
+            <a:off x="4718304" y="2542032"/>
             <a:ext cx="2798064" cy="274320"/>
           </a:xfrm>
           <a:prstGeom prst="rect">
@@ -15587,7 +15864,7 @@
         </p:nvSpPr>
         <p:spPr>
           <a:xfrm>
-            <a:off x="4718304" y="3026664"/>
+            <a:off x="4718304" y="2852928"/>
             <a:ext cx="2798064" cy="457200"/>
           </a:xfrm>
           <a:prstGeom prst="rect">
@@ -15623,8 +15900,8 @@
         </p:nvSpPr>
         <p:spPr>
           <a:xfrm>
-            <a:off x="4718304" y="3657600"/>
-            <a:ext cx="2798064" cy="1005840"/>
+            <a:off x="4718304" y="3456432"/>
+            <a:ext cx="2798064" cy="914400"/>
           </a:xfrm>
           <a:prstGeom prst="rect">
             <a:avLst/>
@@ -15639,11 +15916,11 @@
           <a:p>
             <a:pPr algn="l">
               <a:lnSpc>
-                <a:spcPct val="140000"/>
+                <a:spcPct val="136000"/>
               </a:lnSpc>
             </a:pPr>
             <a:r>
-              <a:rPr sz="1250" b="0" i="0">
+              <a:rPr sz="1200" b="0" i="0">
                 <a:solidFill>
                   <a:srgbClr val="6E5C66"/>
                 </a:solidFill>
@@ -15663,8 +15940,8 @@
         </p:nvSpPr>
         <p:spPr>
           <a:xfrm>
-            <a:off x="8010144" y="2423160"/>
-            <a:ext cx="3346704" cy="2377440"/>
+            <a:off x="8010144" y="2286000"/>
+            <a:ext cx="3346704" cy="2148840"/>
           </a:xfrm>
           <a:prstGeom prst="roundRect">
             <a:avLst>
@@ -15709,7 +15986,7 @@
         </p:nvSpPr>
         <p:spPr>
           <a:xfrm>
-            <a:off x="8302752" y="2697480"/>
+            <a:off x="8302752" y="2542032"/>
             <a:ext cx="2798064" cy="274320"/>
           </a:xfrm>
           <a:prstGeom prst="rect">
@@ -15745,7 +16022,7 @@
         </p:nvSpPr>
         <p:spPr>
           <a:xfrm>
-            <a:off x="8302752" y="3026664"/>
+            <a:off x="8302752" y="2852928"/>
             <a:ext cx="2798064" cy="457200"/>
           </a:xfrm>
           <a:prstGeom prst="rect">
@@ -15781,8 +16058,8 @@
         </p:nvSpPr>
         <p:spPr>
           <a:xfrm>
-            <a:off x="8302752" y="3657600"/>
-            <a:ext cx="2798064" cy="1005840"/>
+            <a:off x="8302752" y="3456432"/>
+            <a:ext cx="2798064" cy="914400"/>
           </a:xfrm>
           <a:prstGeom prst="rect">
             <a:avLst/>
@@ -15797,11 +16074,11 @@
           <a:p>
             <a:pPr algn="l">
               <a:lnSpc>
-                <a:spcPct val="140000"/>
+                <a:spcPct val="136000"/>
               </a:lnSpc>
             </a:pPr>
             <a:r>
-              <a:rPr sz="1250" b="0" i="0">
+              <a:rPr sz="1200" b="0" i="0">
                 <a:solidFill>
                   <a:srgbClr val="D8BECB"/>
                 </a:solidFill>
@@ -15821,7 +16098,101 @@
         </p:nvSpPr>
         <p:spPr>
           <a:xfrm>
-            <a:off x="841248" y="5074920"/>
+            <a:off x="841248" y="4617720"/>
+            <a:ext cx="10506456" cy="603504"/>
+          </a:xfrm>
+          <a:prstGeom prst="roundRect">
+            <a:avLst>
+              <a:gd name="adj" fmla="val 6000"/>
+            </a:avLst>
+          </a:prstGeom>
+          <a:solidFill>
+            <a:srgbClr val="F7E9F0"/>
+          </a:solidFill>
+          <a:ln w="12700">
+            <a:solidFill>
+              <a:srgbClr val="EBD3DF"/>
+            </a:solidFill>
+          </a:ln>
+          <a:effectLst/>
+        </p:spPr>
+        <p:style>
+          <a:lnRef idx="1">
+            <a:schemeClr val="accent1"/>
+          </a:lnRef>
+          <a:fillRef idx="3">
+            <a:schemeClr val="accent1"/>
+          </a:fillRef>
+          <a:effectRef idx="2">
+            <a:schemeClr val="accent1"/>
+          </a:effectRef>
+          <a:fontRef idx="minor">
+            <a:schemeClr val="lt1"/>
+          </a:fontRef>
+        </p:style>
+        <p:txBody>
+          <a:bodyPr rtlCol="0" anchor="ctr"/>
+          <a:lstStyle/>
+          <a:p>
+            <a:pPr algn="ctr"/>
+          </a:p>
+        </p:txBody>
+      </p:sp>
+      <p:sp>
+        <p:nvSpPr>
+          <p:cNvPr id="18" name="TextBox 17"/>
+          <p:cNvSpPr txBox="1"/>
+          <p:nvPr/>
+        </p:nvSpPr>
+        <p:spPr>
+          <a:xfrm>
+            <a:off x="1097280" y="4718304"/>
+            <a:ext cx="10058400" cy="457200"/>
+          </a:xfrm>
+          <a:prstGeom prst="rect">
+            <a:avLst/>
+          </a:prstGeom>
+          <a:noFill/>
+        </p:spPr>
+        <p:txBody>
+          <a:bodyPr wrap="square" anchor="ctr" lIns="0" rIns="0" tIns="0" bIns="0">
+            <a:spAutoFit/>
+          </a:bodyPr>
+          <a:lstStyle/>
+          <a:p>
+            <a:pPr algn="l"/>
+            <a:r>
+              <a:rPr sz="1250" b="1" i="0">
+                <a:solidFill>
+                  <a:srgbClr val="A8517D"/>
+                </a:solidFill>
+                <a:latin typeface="PingFang TC"/>
+                <a:ea typeface="PingFang TC"/>
+              </a:rPr>
+              <a:t>對保險的意義　</a:t>
+            </a:r>
+            <a:r>
+              <a:rPr sz="1250" b="1" i="0">
+                <a:solidFill>
+                  <a:srgbClr val="2B2126"/>
+                </a:solidFill>
+                <a:latin typeface="PingFang TC"/>
+                <a:ea typeface="PingFang TC"/>
+              </a:rPr>
+              <a:t>分級的照護服務 → 更強的投保誘因（轉換率↑）與續保黏著（續保率↑），形成差異化銷售切點。</a:t>
+            </a:r>
+          </a:p>
+        </p:txBody>
+      </p:sp>
+      <p:sp>
+        <p:nvSpPr>
+          <p:cNvPr id="19" name="Rounded Rectangle 18"/>
+          <p:cNvSpPr/>
+          <p:nvPr/>
+        </p:nvSpPr>
+        <p:spPr>
+          <a:xfrm>
+            <a:off x="841248" y="5349240"/>
             <a:ext cx="10506456" cy="566928"/>
           </a:xfrm>
           <a:prstGeom prst="roundRect">
@@ -15863,13 +16234,13 @@
       </p:sp>
       <p:sp>
         <p:nvSpPr>
-          <p:cNvPr id="18" name="TextBox 17"/>
-          <p:cNvSpPr txBox="1"/>
-          <p:nvPr/>
-        </p:nvSpPr>
-        <p:spPr>
-          <a:xfrm>
-            <a:off x="1078992" y="5166360"/>
+          <p:cNvPr id="20" name="TextBox 19"/>
+          <p:cNvSpPr txBox="1"/>
+          <p:nvPr/>
+        </p:nvSpPr>
+        <p:spPr>
+          <a:xfrm>
+            <a:off x="1078992" y="5440680"/>
             <a:ext cx="10049256" cy="457200"/>
           </a:xfrm>
           <a:prstGeom prst="rect">
@@ -15902,14 +16273,14 @@
                 <a:latin typeface="PingFang TC"/>
                 <a:ea typeface="PingFang TC"/>
               </a:rPr>
-              <a:t>這是「照護服務」的分級，不是保費分級。保障條款與費率由和泰主導、待法遵評估；行為/健康資料用於服務體驗，不作為核保依據、不影響保費。</a:t>
-            </a:r>
-          </a:p>
-        </p:txBody>
-      </p:sp>
-      <p:sp>
-        <p:nvSpPr>
-          <p:cNvPr id="19" name="TextBox 18"/>
+              <a:t>這是「照護服務」的分級，不是保費分級。保障條款與費率由和泰主導、待法遵評估；行為／健康資料用於服務體驗，不作為核保依據、不影響保費。</a:t>
+            </a:r>
+          </a:p>
+        </p:txBody>
+      </p:sp>
+      <p:sp>
+        <p:nvSpPr>
+          <p:cNvPr id="21" name="TextBox 20"/>
           <p:cNvSpPr txBox="1"/>
           <p:nvPr/>
         </p:nvSpPr>
@@ -16235,7 +16606,7 @@
                 <a:latin typeface="PingFang TC"/>
                 <a:ea typeface="PingFang TC"/>
               </a:rPr>
-              <a:t>方向一 · 銷售↑</a:t>
+              <a:t>方向一 · 銷售↑ · 轉換率</a:t>
             </a:r>
           </a:p>
         </p:txBody>
@@ -16439,7 +16810,7 @@
                 <a:latin typeface="PingFang TC"/>
                 <a:ea typeface="PingFang TC"/>
               </a:rPr>
-              <a:t>方向二 · 銷售↑</a:t>
+              <a:t>方向二 · 銷售↑ · 投保理解</a:t>
             </a:r>
           </a:p>
         </p:txBody>
@@ -16643,7 +17014,7 @@
                 <a:latin typeface="PingFang TC"/>
                 <a:ea typeface="PingFang TC"/>
               </a:rPr>
-              <a:t>方向三 · 人工↓</a:t>
+              <a:t>方向三 · 人工↓ · 審核工時</a:t>
             </a:r>
           </a:p>
         </p:txBody>
@@ -16847,7 +17218,7 @@
                 <a:latin typeface="PingFang TC"/>
                 <a:ea typeface="PingFang TC"/>
               </a:rPr>
-              <a:t>方向四 · 銷售↑</a:t>
+              <a:t>方向四 · 銷售↑ · 續保黏著</a:t>
             </a:r>
           </a:p>
         </p:txBody>
